--- a/要件定義_PowerPoint.pptx
+++ b/要件定義_PowerPoint.pptx
@@ -319,7 +319,19 @@
           <a:p>
             <a:r>
               <a:rPr lang="ja-JP" altLang="en-US" dirty="0"/>
-              <a:t>「はじめよう！要件定義」の書籍をもとに、要件定義について発表させていただきます。</a:t>
+              <a:t>「はじめよう！要件定義」の書籍をもとに、要件定義についてまとめた</a:t>
+            </a:r>
+            <a:r>
+              <a:rPr lang="en-US" altLang="ja-JP" dirty="0"/>
+              <a:t>PowerPoint</a:t>
+            </a:r>
+            <a:r>
+              <a:rPr lang="ja-JP" altLang="en-US"/>
+              <a:t>を発表</a:t>
+            </a:r>
+            <a:r>
+              <a:rPr lang="ja-JP" altLang="en-US" dirty="0"/>
+              <a:t>させていただきます。</a:t>
             </a:r>
             <a:endParaRPr dirty="0"/>
           </a:p>
@@ -24271,4 +24283,26 @@
     </a:ext>
   </a:extLst>
 </a:theme>
+</file>
+
+<file path=ppt/webextensions/taskpanes.xml><?xml version="1.0" encoding="utf-8"?>
+<wetp:taskpanes xmlns:wetp="http://schemas.microsoft.com/office/webextensions/taskpanes/2010/11">
+  <wetp:taskpane dockstate="right" visibility="0" width="525" row="0">
+    <wetp:webextensionref xmlns:r="http://schemas.openxmlformats.org/officeDocument/2006/relationships" r:id="rId1"/>
+  </wetp:taskpane>
+</wetp:taskpanes>
+</file>
+
+<file path=ppt/webextensions/webextension1.xml><?xml version="1.0" encoding="utf-8"?>
+<we:webextension xmlns:we="http://schemas.microsoft.com/office/webextensions/webextension/2010/11" id="{D96B424F-83E0-448E-9D6E-F9A38513184E}">
+  <we:reference id="wa200010001" version="1.0.0.1" store="en-US" storeType="OMEX"/>
+  <we:alternateReferences>
+    <we:reference id="WA200010001" version="1.0.0.1" store="" storeType="OMEX"/>
+  </we:alternateReferences>
+  <we:properties>
+    <we:property name="claude.fileId" value="&quot;564aab91-7d0d-4e50-97f4-88b0891ed865&quot;"/>
+  </we:properties>
+  <we:bindings/>
+  <we:snapshot xmlns:r="http://schemas.openxmlformats.org/officeDocument/2006/relationships"/>
+</we:webextension>
 </file>